--- a/lessons-v2/day05/day05.pptx
+++ b/lessons-v2/day05/day05.pptx
@@ -22,9 +22,11 @@
     <p:sldId id="270" r:id="rId16"/>
     <p:sldId id="271" r:id="rId17"/>
     <p:sldId id="272" r:id="rId18"/>
+    <p:sldId id="273" r:id="rId19"/>
+    <p:sldId id="274" r:id="rId20"/>
   </p:sldIdLst>
   <p:notesMasterIdLst>
-    <p:notesMasterId r:id="rId19"/>
+    <p:notesMasterId r:id="rId21"/>
   </p:notesMasterIdLst>
   <p:sldSz cx="12192000" cy="6858000"/>
   <p:notesSz cx="6858000" cy="12192000"/>
@@ -518,20 +520,20 @@
           <a:p>
             <a:r>
               <a:rPr lang="en-US" dirty="0"/>
-              <a:t>RUN SHEET (~85 min). Hands-on INTERLEAVED. Assignment brief is the last block.
+              <a:t>RUN SHEET (~88 min). Hands-on INTERLEAVED. Assignment brief is the last block.
 00:00 Journey check + hook (crack a hash on the projector)     4
-00:04 What crypto is for — three jobs                          4
-00:08 Job 1: encryption / symmetric                            6
-00:14 Asymmetric / public key — solves key exchange            8
-00:22 DO: inspect a real certificate                           4
-00:26 Job 2: hashing — one-way, tamper-evident                 8
-00:34 DO: sha256 a file, flip one byte                         4
-00:38 Password storage done right (the trap)                   7
-00:45 DO: crack hashes with a wordlist                        10
-00:55 Job 3: signatures + the TLS handshake in 4 steps         6
-01:01 Attack &lt;-&gt; defence + "don't roll your own"               5
-01:06 Wrap + artifact (the 5-primitives table)                 3
-01:09 WEEK 1 ASSIGNMENT BRIEF                                  16
+00:04 What crypto is: four goals, three types, three jobs      7
+00:11 Job 1: encryption / symmetric                            6
+00:17 Asymmetric / public key — solves key exchange            8
+00:25 DO: inspect a real certificate                           4
+00:29 Job 2: hashing — one-way, tamper-evident                 8
+00:37 DO: sha256 a file, flip one byte                         4
+00:41 Password storage done right (the trap)                   7
+00:48 DO: crack hashes with a wordlist                        10
+00:58 Job 3: signatures + the TLS handshake in 4 steps         6
+01:04 Attack &lt;-&gt; defence + "don't roll your own"               5
+01:09 Wrap + artifact (the 5-primitives table)                 3
+01:12 WEEK 1 ASSIGNMENT BRIEF                                  16
 CUT FIRST IF SHORT: the cert "do it now" (show one on the projector instead); the sha256 flip
 (describe it); the signatures detail (keep "private signs, public verifies, a cert is a CA's
 signature on a name").
@@ -627,6 +629,185 @@
           <a:p>
             <a:r>
               <a:rPr lang="en-US" dirty="0"/>
+              <a:t>The "no key, can't reverse" point is the one students miss. Encryption is a locked box you can
+open with the key. A hash is a paper shredder — deterministic, but there's no un-shredder.
+SHA-256 good; MD5 and SHA-1 are broken (collisions) — name them as "don't use".</a:t>
+            </a:r>
+            <a:endParaRPr lang="en-US" dirty="0"/>
+          </a:p>
+        </p:txBody>
+      </p:sp>
+      <p:sp>
+        <p:nvSpPr>
+          <p:cNvPr id="4" name="Slide Number Placeholder 3"/>
+          <p:cNvSpPr>
+            <a:spLocks noGrp="1"/>
+          </p:cNvSpPr>
+          <p:nvPr>
+            <p:ph type="sldNum" sz="quarter" idx="10"/>
+          </p:nvPr>
+        </p:nvSpPr>
+        <p:spPr/>
+        <p:txBody>
+          <a:bodyPr/>
+          <a:lstStyle/>
+          <a:p>
+            <a:fld id="{F7021451-1387-4CA6-816F-3879F97B5CBC}" type="slidenum">
+              <a:rPr lang="en-US"/>
+              <a:t>10</a:t>
+            </a:fld>
+            <a:endParaRPr lang="en-US"/>
+          </a:p>
+        </p:txBody>
+      </p:sp>
+    </p:spTree>
+    <p:extLst>
+      <p:ext uri="{BB962C8B-B14F-4D97-AF65-F5344CB8AC3E}">
+        <p14:creationId xmlns:p14="http://schemas.microsoft.com/office/powerpoint/2010/main" val="1024086991"/>
+      </p:ext>
+    </p:extLst>
+  </p:cSld>
+  <p:clrMapOvr>
+    <a:masterClrMapping/>
+  </p:clrMapOvr>
+</p:notes>
+</file>
+
+<file path=ppt/notesSlides/notesSlide11.xml><?xml version="1.0" encoding="utf-8"?>
+<p:notes xmlns:a="http://schemas.openxmlformats.org/drawingml/2006/main" xmlns:r="http://schemas.openxmlformats.org/officeDocument/2006/relationships" xmlns:p="http://schemas.openxmlformats.org/presentationml/2006/main">
+  <p:cSld>
+    <p:spTree>
+      <p:nvGrpSpPr>
+        <p:cNvPr id="1" name=""/>
+        <p:cNvGrpSpPr/>
+        <p:nvPr/>
+      </p:nvGrpSpPr>
+      <p:grpSpPr>
+        <a:xfrm>
+          <a:off x="0" y="0"/>
+          <a:ext cx="0" cy="0"/>
+          <a:chOff x="0" y="0"/>
+          <a:chExt cx="0" cy="0"/>
+        </a:xfrm>
+      </p:grpSpPr>
+      <p:sp>
+        <p:nvSpPr>
+          <p:cNvPr id="2" name="Slide Image Placeholder 1"/>
+          <p:cNvSpPr>
+            <a:spLocks noGrp="1" noRot="1" noChangeAspect="1"/>
+          </p:cNvSpPr>
+          <p:nvPr>
+            <p:ph type="sldImg"/>
+          </p:nvPr>
+        </p:nvSpPr>
+        <p:spPr/>
+      </p:sp>
+      <p:sp>
+        <p:nvSpPr>
+          <p:cNvPr id="3" name="Notes Placeholder 2"/>
+          <p:cNvSpPr>
+            <a:spLocks noGrp="1"/>
+          </p:cNvSpPr>
+          <p:nvPr>
+            <p:ph type="body" idx="1"/>
+          </p:nvPr>
+        </p:nvSpPr>
+        <p:spPr/>
+        <p:txBody>
+          <a:bodyPr/>
+          <a:lstStyle/>
+          <a:p>
+            <a:r>
+              <a:rPr lang="en-US" dirty="0"/>
+              <a:t>2-3 min. Point at the two hashes side by side: not "a bit different" — completely different.
+This is why a hash is a good tamper detector.</a:t>
+            </a:r>
+            <a:endParaRPr lang="en-US" dirty="0"/>
+          </a:p>
+        </p:txBody>
+      </p:sp>
+      <p:sp>
+        <p:nvSpPr>
+          <p:cNvPr id="4" name="Slide Number Placeholder 3"/>
+          <p:cNvSpPr>
+            <a:spLocks noGrp="1"/>
+          </p:cNvSpPr>
+          <p:nvPr>
+            <p:ph type="sldNum" sz="quarter" idx="10"/>
+          </p:nvPr>
+        </p:nvSpPr>
+        <p:spPr/>
+        <p:txBody>
+          <a:bodyPr/>
+          <a:lstStyle/>
+          <a:p>
+            <a:fld id="{F7021451-1387-4CA6-816F-3879F97B5CBC}" type="slidenum">
+              <a:rPr lang="en-US"/>
+              <a:t>11</a:t>
+            </a:fld>
+            <a:endParaRPr lang="en-US"/>
+          </a:p>
+        </p:txBody>
+      </p:sp>
+    </p:spTree>
+    <p:extLst>
+      <p:ext uri="{BB962C8B-B14F-4D97-AF65-F5344CB8AC3E}">
+        <p14:creationId xmlns:p14="http://schemas.microsoft.com/office/powerpoint/2010/main" val="1024086991"/>
+      </p:ext>
+    </p:extLst>
+  </p:cSld>
+  <p:clrMapOvr>
+    <a:masterClrMapping/>
+  </p:clrMapOvr>
+</p:notes>
+</file>
+
+<file path=ppt/notesSlides/notesSlide12.xml><?xml version="1.0" encoding="utf-8"?>
+<p:notes xmlns:a="http://schemas.openxmlformats.org/drawingml/2006/main" xmlns:r="http://schemas.openxmlformats.org/officeDocument/2006/relationships" xmlns:p="http://schemas.openxmlformats.org/presentationml/2006/main">
+  <p:cSld>
+    <p:spTree>
+      <p:nvGrpSpPr>
+        <p:cNvPr id="1" name=""/>
+        <p:cNvGrpSpPr/>
+        <p:nvPr/>
+      </p:nvGrpSpPr>
+      <p:grpSpPr>
+        <a:xfrm>
+          <a:off x="0" y="0"/>
+          <a:ext cx="0" cy="0"/>
+          <a:chOff x="0" y="0"/>
+          <a:chExt cx="0" cy="0"/>
+        </a:xfrm>
+      </p:grpSpPr>
+      <p:sp>
+        <p:nvSpPr>
+          <p:cNvPr id="2" name="Slide Image Placeholder 1"/>
+          <p:cNvSpPr>
+            <a:spLocks noGrp="1" noRot="1" noChangeAspect="1"/>
+          </p:cNvSpPr>
+          <p:nvPr>
+            <p:ph type="sldImg"/>
+          </p:nvPr>
+        </p:nvSpPr>
+        <p:spPr/>
+      </p:sp>
+      <p:sp>
+        <p:nvSpPr>
+          <p:cNvPr id="3" name="Notes Placeholder 2"/>
+          <p:cNvSpPr>
+            <a:spLocks noGrp="1"/>
+          </p:cNvSpPr>
+          <p:nvPr>
+            <p:ph type="body" idx="1"/>
+          </p:nvPr>
+        </p:nvSpPr>
+        <p:spPr/>
+        <p:txBody>
+          <a:bodyPr/>
+          <a:lstStyle/>
+          <a:p>
+            <a:r>
+              <a:rPr lang="en-US" dirty="0"/>
               <a:t>THE DAY 5 TRAP: "we encrypt the passwords." No — you HASH them, salted and slow. If you can
 email a user their forgotten password, you're doing it wrong.
 Fast hash (MD5/SHA-256 alone) of a password = crackable at billions/sec on a GPU. Slow hash
@@ -653,7 +834,7 @@
           <a:p>
             <a:fld id="{F7021451-1387-4CA6-816F-3879F97B5CBC}" type="slidenum">
               <a:rPr lang="en-US"/>
-              <a:t>10</a:t>
+              <a:t>12</a:t>
             </a:fld>
             <a:endParaRPr lang="en-US"/>
           </a:p>
@@ -672,7 +853,7 @@
 </p:notes>
 </file>
 
-<file path=ppt/notesSlides/notesSlide11.xml><?xml version="1.0" encoding="utf-8"?>
+<file path=ppt/notesSlides/notesSlide13.xml><?xml version="1.0" encoding="utf-8"?>
 <p:notes xmlns:a="http://schemas.openxmlformats.org/drawingml/2006/main" xmlns:r="http://schemas.openxmlformats.org/officeDocument/2006/relationships" xmlns:p="http://schemas.openxmlformats.org/presentationml/2006/main">
   <p:cSld>
     <p:spTree>
@@ -745,7 +926,7 @@
           <a:p>
             <a:fld id="{F7021451-1387-4CA6-816F-3879F97B5CBC}" type="slidenum">
               <a:rPr lang="en-US"/>
-              <a:t>11</a:t>
+              <a:t>13</a:t>
             </a:fld>
             <a:endParaRPr lang="en-US"/>
           </a:p>
@@ -764,7 +945,7 @@
 </p:notes>
 </file>
 
-<file path=ppt/notesSlides/notesSlide12.xml><?xml version="1.0" encoding="utf-8"?>
+<file path=ppt/notesSlides/notesSlide14.xml><?xml version="1.0" encoding="utf-8"?>
 <p:notes xmlns:a="http://schemas.openxmlformats.org/drawingml/2006/main" xmlns:r="http://schemas.openxmlformats.org/officeDocument/2006/relationships" xmlns:p="http://schemas.openxmlformats.org/presentationml/2006/main">
   <p:cSld>
     <p:spTree>
@@ -834,7 +1015,7 @@
           <a:p>
             <a:fld id="{F7021451-1387-4CA6-816F-3879F97B5CBC}" type="slidenum">
               <a:rPr lang="en-US"/>
-              <a:t>12</a:t>
+              <a:t>14</a:t>
             </a:fld>
             <a:endParaRPr lang="en-US"/>
           </a:p>
@@ -853,7 +1034,7 @@
 </p:notes>
 </file>
 
-<file path=ppt/notesSlides/notesSlide13.xml><?xml version="1.0" encoding="utf-8"?>
+<file path=ppt/notesSlides/notesSlide15.xml><?xml version="1.0" encoding="utf-8"?>
 <p:notes xmlns:a="http://schemas.openxmlformats.org/drawingml/2006/main" xmlns:r="http://schemas.openxmlformats.org/officeDocument/2006/relationships" xmlns:p="http://schemas.openxmlformats.org/presentationml/2006/main">
   <p:cSld>
     <p:spTree>
@@ -923,7 +1104,7 @@
           <a:p>
             <a:fld id="{F7021451-1387-4CA6-816F-3879F97B5CBC}" type="slidenum">
               <a:rPr lang="en-US"/>
-              <a:t>13</a:t>
+              <a:t>15</a:t>
             </a:fld>
             <a:endParaRPr lang="en-US"/>
           </a:p>
@@ -942,7 +1123,7 @@
 </p:notes>
 </file>
 
-<file path=ppt/notesSlides/notesSlide14.xml><?xml version="1.0" encoding="utf-8"?>
+<file path=ppt/notesSlides/notesSlide16.xml><?xml version="1.0" encoding="utf-8"?>
 <p:notes xmlns:a="http://schemas.openxmlformats.org/drawingml/2006/main" xmlns:r="http://schemas.openxmlformats.org/officeDocument/2006/relationships" xmlns:p="http://schemas.openxmlformats.org/presentationml/2006/main">
   <p:cSld>
     <p:spTree>
@@ -1011,7 +1192,7 @@
           <a:p>
             <a:fld id="{F7021451-1387-4CA6-816F-3879F97B5CBC}" type="slidenum">
               <a:rPr lang="en-US"/>
-              <a:t>14</a:t>
+              <a:t>16</a:t>
             </a:fld>
             <a:endParaRPr lang="en-US"/>
           </a:p>
@@ -1030,7 +1211,7 @@
 </p:notes>
 </file>
 
-<file path=ppt/notesSlides/notesSlide15.xml><?xml version="1.0" encoding="utf-8"?>
+<file path=ppt/notesSlides/notesSlide17.xml><?xml version="1.0" encoding="utf-8"?>
 <p:notes xmlns:a="http://schemas.openxmlformats.org/drawingml/2006/main" xmlns:r="http://schemas.openxmlformats.org/officeDocument/2006/relationships" xmlns:p="http://schemas.openxmlformats.org/presentationml/2006/main">
   <p:cSld>
     <p:spTree>
@@ -1099,7 +1280,7 @@
           <a:p>
             <a:fld id="{F7021451-1387-4CA6-816F-3879F97B5CBC}" type="slidenum">
               <a:rPr lang="en-US"/>
-              <a:t>15</a:t>
+              <a:t>17</a:t>
             </a:fld>
             <a:endParaRPr lang="en-US"/>
           </a:p>
@@ -1118,7 +1299,7 @@
 </p:notes>
 </file>
 
-<file path=ppt/notesSlides/notesSlide16.xml><?xml version="1.0" encoding="utf-8"?>
+<file path=ppt/notesSlides/notesSlide18.xml><?xml version="1.0" encoding="utf-8"?>
 <p:notes xmlns:a="http://schemas.openxmlformats.org/drawingml/2006/main" xmlns:r="http://schemas.openxmlformats.org/officeDocument/2006/relationships" xmlns:p="http://schemas.openxmlformats.org/presentationml/2006/main">
   <p:cSld>
     <p:spTree>
@@ -1189,7 +1370,7 @@
           <a:p>
             <a:fld id="{F7021451-1387-4CA6-816F-3879F97B5CBC}" type="slidenum">
               <a:rPr lang="en-US"/>
-              <a:t>16</a:t>
+              <a:t>18</a:t>
             </a:fld>
             <a:endParaRPr lang="en-US"/>
           </a:p>
@@ -1208,7 +1389,7 @@
 </p:notes>
 </file>
 
-<file path=ppt/notesSlides/notesSlide17.xml><?xml version="1.0" encoding="utf-8"?>
+<file path=ppt/notesSlides/notesSlide19.xml><?xml version="1.0" encoding="utf-8"?>
 <p:notes xmlns:a="http://schemas.openxmlformats.org/drawingml/2006/main" xmlns:r="http://schemas.openxmlformats.org/officeDocument/2006/relationships" xmlns:p="http://schemas.openxmlformats.org/presentationml/2006/main">
   <p:cSld>
     <p:spTree>
@@ -1278,7 +1459,7 @@
           <a:p>
             <a:fld id="{F7021451-1387-4CA6-816F-3879F97B5CBC}" type="slidenum">
               <a:rPr lang="en-US"/>
-              <a:t>17</a:t>
+              <a:t>19</a:t>
             </a:fld>
             <a:endParaRPr lang="en-US"/>
           </a:p>
@@ -1522,8 +1703,11 @@
           <a:p>
             <a:r>
               <a:rPr lang="en-US" dirty="0"/>
-              <a:t>Every secure system is some mix of these three. TLS (Day 4) uses all three at once.
-"Don't roll your own crypto" — we'll come back to why at the end. Say it now so it sinks in.</a:t>
+              <a:t>Set the vocabulary before the tools. Four goals; the next-but-one slide groups them as the
+"three jobs" we'll use all day (authentication + non-repudiation both live under "identity").
+Non-repudiation = a signature is proof it was YOU; you can't later say "that wasn't me".
+Careful with "scrambling": encryption and signatures fit it; a hash does not (one-way, no key) --
+we make that point on the hashing slide.</a:t>
             </a:r>
             <a:endParaRPr lang="en-US" dirty="0"/>
           </a:p>
@@ -1566,6 +1750,189 @@
 </file>
 
 <file path=ppt/notesSlides/notesSlide5.xml><?xml version="1.0" encoding="utf-8"?>
+<p:notes xmlns:a="http://schemas.openxmlformats.org/drawingml/2006/main" xmlns:r="http://schemas.openxmlformats.org/officeDocument/2006/relationships" xmlns:p="http://schemas.openxmlformats.org/presentationml/2006/main">
+  <p:cSld>
+    <p:spTree>
+      <p:nvGrpSpPr>
+        <p:cNvPr id="1" name=""/>
+        <p:cNvGrpSpPr/>
+        <p:nvPr/>
+      </p:nvGrpSpPr>
+      <p:grpSpPr>
+        <a:xfrm>
+          <a:off x="0" y="0"/>
+          <a:ext cx="0" cy="0"/>
+          <a:chOff x="0" y="0"/>
+          <a:chExt cx="0" cy="0"/>
+        </a:xfrm>
+      </p:grpSpPr>
+      <p:sp>
+        <p:nvSpPr>
+          <p:cNvPr id="2" name="Slide Image Placeholder 1"/>
+          <p:cNvSpPr>
+            <a:spLocks noGrp="1" noRot="1" noChangeAspect="1"/>
+          </p:cNvSpPr>
+          <p:nvPr>
+            <p:ph type="sldImg"/>
+          </p:nvPr>
+        </p:nvSpPr>
+        <p:spPr/>
+      </p:sp>
+      <p:sp>
+        <p:nvSpPr>
+          <p:cNvPr id="3" name="Notes Placeholder 2"/>
+          <p:cNvSpPr>
+            <a:spLocks noGrp="1"/>
+          </p:cNvSpPr>
+          <p:nvPr>
+            <p:ph type="body" idx="1"/>
+          </p:nvPr>
+        </p:nvSpPr>
+        <p:spPr/>
+        <p:txBody>
+          <a:bodyPr/>
+          <a:lstStyle/>
+          <a:p>
+            <a:r>
+              <a:rPr lang="en-US" dirty="0"/>
+              <a:t>Quick overview, ~2 min -- each type gets its own slide next. Two things to say out loud so the
+overview isn't misleading: (1) "public key encrypts, private key decrypts" is the encryption
+direction; signing runs the OTHER way (private signs, public verifies) -- Job 3 slide.
+(2) A plain hash is not enough for passwords -- salted + SLOW hash, two slides on. Don't let
+"hash = password storage" stand alone.</a:t>
+            </a:r>
+            <a:endParaRPr lang="en-US" dirty="0"/>
+          </a:p>
+        </p:txBody>
+      </p:sp>
+      <p:sp>
+        <p:nvSpPr>
+          <p:cNvPr id="4" name="Slide Number Placeholder 3"/>
+          <p:cNvSpPr>
+            <a:spLocks noGrp="1"/>
+          </p:cNvSpPr>
+          <p:nvPr>
+            <p:ph type="sldNum" sz="quarter" idx="10"/>
+          </p:nvPr>
+        </p:nvSpPr>
+        <p:spPr/>
+        <p:txBody>
+          <a:bodyPr/>
+          <a:lstStyle/>
+          <a:p>
+            <a:fld id="{F7021451-1387-4CA6-816F-3879F97B5CBC}" type="slidenum">
+              <a:rPr lang="en-US"/>
+              <a:t>5</a:t>
+            </a:fld>
+            <a:endParaRPr lang="en-US"/>
+          </a:p>
+        </p:txBody>
+      </p:sp>
+    </p:spTree>
+    <p:extLst>
+      <p:ext uri="{BB962C8B-B14F-4D97-AF65-F5344CB8AC3E}">
+        <p14:creationId xmlns:p14="http://schemas.microsoft.com/office/powerpoint/2010/main" val="1024086991"/>
+      </p:ext>
+    </p:extLst>
+  </p:cSld>
+  <p:clrMapOvr>
+    <a:masterClrMapping/>
+  </p:clrMapOvr>
+</p:notes>
+</file>
+
+<file path=ppt/notesSlides/notesSlide6.xml><?xml version="1.0" encoding="utf-8"?>
+<p:notes xmlns:a="http://schemas.openxmlformats.org/drawingml/2006/main" xmlns:r="http://schemas.openxmlformats.org/officeDocument/2006/relationships" xmlns:p="http://schemas.openxmlformats.org/presentationml/2006/main">
+  <p:cSld>
+    <p:spTree>
+      <p:nvGrpSpPr>
+        <p:cNvPr id="1" name=""/>
+        <p:cNvGrpSpPr/>
+        <p:nvPr/>
+      </p:nvGrpSpPr>
+      <p:grpSpPr>
+        <a:xfrm>
+          <a:off x="0" y="0"/>
+          <a:ext cx="0" cy="0"/>
+          <a:chOff x="0" y="0"/>
+          <a:chExt cx="0" cy="0"/>
+        </a:xfrm>
+      </p:grpSpPr>
+      <p:sp>
+        <p:nvSpPr>
+          <p:cNvPr id="2" name="Slide Image Placeholder 1"/>
+          <p:cNvSpPr>
+            <a:spLocks noGrp="1" noRot="1" noChangeAspect="1"/>
+          </p:cNvSpPr>
+          <p:nvPr>
+            <p:ph type="sldImg"/>
+          </p:nvPr>
+        </p:nvSpPr>
+        <p:spPr/>
+      </p:sp>
+      <p:sp>
+        <p:nvSpPr>
+          <p:cNvPr id="3" name="Notes Placeholder 2"/>
+          <p:cNvSpPr>
+            <a:spLocks noGrp="1"/>
+          </p:cNvSpPr>
+          <p:nvPr>
+            <p:ph type="body" idx="1"/>
+          </p:nvPr>
+        </p:nvSpPr>
+        <p:spPr/>
+        <p:txBody>
+          <a:bodyPr/>
+          <a:lstStyle/>
+          <a:p>
+            <a:r>
+              <a:rPr lang="en-US" dirty="0"/>
+              <a:t>Bridge from the previous slides: these three are the four goals grouped -- secrecy =
+confidentiality, tamper-evidence = integrity, identity = authentication + non-repudiation.
+Every secure system is some mix of these three. TLS (Day 4) uses all three at once.
+"Don't roll your own crypto" — we'll come back to why at the end. Say it now so it sinks in.</a:t>
+            </a:r>
+            <a:endParaRPr lang="en-US" dirty="0"/>
+          </a:p>
+        </p:txBody>
+      </p:sp>
+      <p:sp>
+        <p:nvSpPr>
+          <p:cNvPr id="4" name="Slide Number Placeholder 3"/>
+          <p:cNvSpPr>
+            <a:spLocks noGrp="1"/>
+          </p:cNvSpPr>
+          <p:nvPr>
+            <p:ph type="sldNum" sz="quarter" idx="10"/>
+          </p:nvPr>
+        </p:nvSpPr>
+        <p:spPr/>
+        <p:txBody>
+          <a:bodyPr/>
+          <a:lstStyle/>
+          <a:p>
+            <a:fld id="{F7021451-1387-4CA6-816F-3879F97B5CBC}" type="slidenum">
+              <a:rPr lang="en-US"/>
+              <a:t>6</a:t>
+            </a:fld>
+            <a:endParaRPr lang="en-US"/>
+          </a:p>
+        </p:txBody>
+      </p:sp>
+    </p:spTree>
+    <p:extLst>
+      <p:ext uri="{BB962C8B-B14F-4D97-AF65-F5344CB8AC3E}">
+        <p14:creationId xmlns:p14="http://schemas.microsoft.com/office/powerpoint/2010/main" val="1024086991"/>
+      </p:ext>
+    </p:extLst>
+  </p:cSld>
+  <p:clrMapOvr>
+    <a:masterClrMapping/>
+  </p:clrMapOvr>
+</p:notes>
+</file>
+
+<file path=ppt/notesSlides/notesSlide7.xml><?xml version="1.0" encoding="utf-8"?>
 <p:notes xmlns:a="http://schemas.openxmlformats.org/drawingml/2006/main" xmlns:r="http://schemas.openxmlformats.org/officeDocument/2006/relationships" xmlns:p="http://schemas.openxmlformats.org/presentationml/2006/main">
   <p:cSld>
     <p:spTree>
@@ -1636,7 +2003,7 @@
           <a:p>
             <a:fld id="{F7021451-1387-4CA6-816F-3879F97B5CBC}" type="slidenum">
               <a:rPr lang="en-US"/>
-              <a:t>5</a:t>
+              <a:t>7</a:t>
             </a:fld>
             <a:endParaRPr lang="en-US"/>
           </a:p>
@@ -1655,7 +2022,7 @@
 </p:notes>
 </file>
 
-<file path=ppt/notesSlides/notesSlide6.xml><?xml version="1.0" encoding="utf-8"?>
+<file path=ppt/notesSlides/notesSlide8.xml><?xml version="1.0" encoding="utf-8"?>
 <p:notes xmlns:a="http://schemas.openxmlformats.org/drawingml/2006/main" xmlns:r="http://schemas.openxmlformats.org/officeDocument/2006/relationships" xmlns:p="http://schemas.openxmlformats.org/presentationml/2006/main">
   <p:cSld>
     <p:spTree>
@@ -1727,7 +2094,7 @@
           <a:p>
             <a:fld id="{F7021451-1387-4CA6-816F-3879F97B5CBC}" type="slidenum">
               <a:rPr lang="en-US"/>
-              <a:t>6</a:t>
+              <a:t>8</a:t>
             </a:fld>
             <a:endParaRPr lang="en-US"/>
           </a:p>
@@ -1746,7 +2113,7 @@
 </p:notes>
 </file>
 
-<file path=ppt/notesSlides/notesSlide7.xml><?xml version="1.0" encoding="utf-8"?>
+<file path=ppt/notesSlides/notesSlide9.xml><?xml version="1.0" encoding="utf-8"?>
 <p:notes xmlns:a="http://schemas.openxmlformats.org/drawingml/2006/main" xmlns:r="http://schemas.openxmlformats.org/officeDocument/2006/relationships" xmlns:p="http://schemas.openxmlformats.org/presentationml/2006/main">
   <p:cSld>
     <p:spTree>
@@ -1796,185 +2163,6 @@
 The chain is the point: your browser ships with ~150 trusted root CAs; everything descends
 from one of those by signatures. Forward-ref: if a school proxy is intercepting TLS, the
 issuer here will be the proxy, not a public CA — real "who do you trust" example.</a:t>
-            </a:r>
-            <a:endParaRPr lang="en-US" dirty="0"/>
-          </a:p>
-        </p:txBody>
-      </p:sp>
-      <p:sp>
-        <p:nvSpPr>
-          <p:cNvPr id="4" name="Slide Number Placeholder 3"/>
-          <p:cNvSpPr>
-            <a:spLocks noGrp="1"/>
-          </p:cNvSpPr>
-          <p:nvPr>
-            <p:ph type="sldNum" sz="quarter" idx="10"/>
-          </p:nvPr>
-        </p:nvSpPr>
-        <p:spPr/>
-        <p:txBody>
-          <a:bodyPr/>
-          <a:lstStyle/>
-          <a:p>
-            <a:fld id="{F7021451-1387-4CA6-816F-3879F97B5CBC}" type="slidenum">
-              <a:rPr lang="en-US"/>
-              <a:t>7</a:t>
-            </a:fld>
-            <a:endParaRPr lang="en-US"/>
-          </a:p>
-        </p:txBody>
-      </p:sp>
-    </p:spTree>
-    <p:extLst>
-      <p:ext uri="{BB962C8B-B14F-4D97-AF65-F5344CB8AC3E}">
-        <p14:creationId xmlns:p14="http://schemas.microsoft.com/office/powerpoint/2010/main" val="1024086991"/>
-      </p:ext>
-    </p:extLst>
-  </p:cSld>
-  <p:clrMapOvr>
-    <a:masterClrMapping/>
-  </p:clrMapOvr>
-</p:notes>
-</file>
-
-<file path=ppt/notesSlides/notesSlide8.xml><?xml version="1.0" encoding="utf-8"?>
-<p:notes xmlns:a="http://schemas.openxmlformats.org/drawingml/2006/main" xmlns:r="http://schemas.openxmlformats.org/officeDocument/2006/relationships" xmlns:p="http://schemas.openxmlformats.org/presentationml/2006/main">
-  <p:cSld>
-    <p:spTree>
-      <p:nvGrpSpPr>
-        <p:cNvPr id="1" name=""/>
-        <p:cNvGrpSpPr/>
-        <p:nvPr/>
-      </p:nvGrpSpPr>
-      <p:grpSpPr>
-        <a:xfrm>
-          <a:off x="0" y="0"/>
-          <a:ext cx="0" cy="0"/>
-          <a:chOff x="0" y="0"/>
-          <a:chExt cx="0" cy="0"/>
-        </a:xfrm>
-      </p:grpSpPr>
-      <p:sp>
-        <p:nvSpPr>
-          <p:cNvPr id="2" name="Slide Image Placeholder 1"/>
-          <p:cNvSpPr>
-            <a:spLocks noGrp="1" noRot="1" noChangeAspect="1"/>
-          </p:cNvSpPr>
-          <p:nvPr>
-            <p:ph type="sldImg"/>
-          </p:nvPr>
-        </p:nvSpPr>
-        <p:spPr/>
-      </p:sp>
-      <p:sp>
-        <p:nvSpPr>
-          <p:cNvPr id="3" name="Notes Placeholder 2"/>
-          <p:cNvSpPr>
-            <a:spLocks noGrp="1"/>
-          </p:cNvSpPr>
-          <p:nvPr>
-            <p:ph type="body" idx="1"/>
-          </p:nvPr>
-        </p:nvSpPr>
-        <p:spPr/>
-        <p:txBody>
-          <a:bodyPr/>
-          <a:lstStyle/>
-          <a:p>
-            <a:r>
-              <a:rPr lang="en-US" dirty="0"/>
-              <a:t>The "no key, can't reverse" point is the one students miss. Encryption is a locked box you can
-open with the key. A hash is a paper shredder — deterministic, but there's no un-shredder.
-SHA-256 good; MD5 and SHA-1 are broken (collisions) — name them as "don't use".</a:t>
-            </a:r>
-            <a:endParaRPr lang="en-US" dirty="0"/>
-          </a:p>
-        </p:txBody>
-      </p:sp>
-      <p:sp>
-        <p:nvSpPr>
-          <p:cNvPr id="4" name="Slide Number Placeholder 3"/>
-          <p:cNvSpPr>
-            <a:spLocks noGrp="1"/>
-          </p:cNvSpPr>
-          <p:nvPr>
-            <p:ph type="sldNum" sz="quarter" idx="10"/>
-          </p:nvPr>
-        </p:nvSpPr>
-        <p:spPr/>
-        <p:txBody>
-          <a:bodyPr/>
-          <a:lstStyle/>
-          <a:p>
-            <a:fld id="{F7021451-1387-4CA6-816F-3879F97B5CBC}" type="slidenum">
-              <a:rPr lang="en-US"/>
-              <a:t>8</a:t>
-            </a:fld>
-            <a:endParaRPr lang="en-US"/>
-          </a:p>
-        </p:txBody>
-      </p:sp>
-    </p:spTree>
-    <p:extLst>
-      <p:ext uri="{BB962C8B-B14F-4D97-AF65-F5344CB8AC3E}">
-        <p14:creationId xmlns:p14="http://schemas.microsoft.com/office/powerpoint/2010/main" val="1024086991"/>
-      </p:ext>
-    </p:extLst>
-  </p:cSld>
-  <p:clrMapOvr>
-    <a:masterClrMapping/>
-  </p:clrMapOvr>
-</p:notes>
-</file>
-
-<file path=ppt/notesSlides/notesSlide9.xml><?xml version="1.0" encoding="utf-8"?>
-<p:notes xmlns:a="http://schemas.openxmlformats.org/drawingml/2006/main" xmlns:r="http://schemas.openxmlformats.org/officeDocument/2006/relationships" xmlns:p="http://schemas.openxmlformats.org/presentationml/2006/main">
-  <p:cSld>
-    <p:spTree>
-      <p:nvGrpSpPr>
-        <p:cNvPr id="1" name=""/>
-        <p:cNvGrpSpPr/>
-        <p:nvPr/>
-      </p:nvGrpSpPr>
-      <p:grpSpPr>
-        <a:xfrm>
-          <a:off x="0" y="0"/>
-          <a:ext cx="0" cy="0"/>
-          <a:chOff x="0" y="0"/>
-          <a:chExt cx="0" cy="0"/>
-        </a:xfrm>
-      </p:grpSpPr>
-      <p:sp>
-        <p:nvSpPr>
-          <p:cNvPr id="2" name="Slide Image Placeholder 1"/>
-          <p:cNvSpPr>
-            <a:spLocks noGrp="1" noRot="1" noChangeAspect="1"/>
-          </p:cNvSpPr>
-          <p:nvPr>
-            <p:ph type="sldImg"/>
-          </p:nvPr>
-        </p:nvSpPr>
-        <p:spPr/>
-      </p:sp>
-      <p:sp>
-        <p:nvSpPr>
-          <p:cNvPr id="3" name="Notes Placeholder 2"/>
-          <p:cNvSpPr>
-            <a:spLocks noGrp="1"/>
-          </p:cNvSpPr>
-          <p:nvPr>
-            <p:ph type="body" idx="1"/>
-          </p:nvPr>
-        </p:nvSpPr>
-        <p:spPr/>
-        <p:txBody>
-          <a:bodyPr/>
-          <a:lstStyle/>
-          <a:p>
-            <a:r>
-              <a:rPr lang="en-US" dirty="0"/>
-              <a:t>2-3 min. Point at the two hashes side by side: not "a bit different" — completely different.
-This is why a hash is a good tamper detector.</a:t>
             </a:r>
             <a:endParaRPr lang="en-US" dirty="0"/>
           </a:p>
@@ -2638,6 +2826,84 @@
 <file path=ppt/slides/slide17.xml><?xml version="1.0" encoding="utf-8"?>
 <p:sld xmlns:a="http://schemas.openxmlformats.org/drawingml/2006/main" xmlns:r="http://schemas.openxmlformats.org/officeDocument/2006/relationships" xmlns:p="http://schemas.openxmlformats.org/presentationml/2006/main">
   <p:cSld name="Slide 17">
+    <p:bg>
+      <p:bgPr>
+        <a:blipFill dpi="0" rotWithShape="1">
+          <a:blip r:embed="rId1">
+            <a:lum/>
+          </a:blip>
+          <a:srcRect/>
+          <a:stretch>
+            <a:fillRect/>
+          </a:stretch>
+        </a:blipFill>
+        <a:effectLst/>
+      </p:bgPr>
+    </p:bg>
+    <p:spTree>
+      <p:nvGrpSpPr>
+        <p:cNvPr id="1" name=""/>
+        <p:cNvGrpSpPr/>
+        <p:nvPr/>
+      </p:nvGrpSpPr>
+      <p:grpSpPr>
+        <a:xfrm>
+          <a:off x="0" y="0"/>
+          <a:ext cx="0" cy="0"/>
+          <a:chOff x="0" y="0"/>
+          <a:chExt cx="0" cy="0"/>
+        </a:xfrm>
+      </p:grpSpPr>
+    </p:spTree>
+  </p:cSld>
+  <p:clrMapOvr>
+    <a:masterClrMapping/>
+  </p:clrMapOvr>
+</p:sld>
+</file>
+
+<file path=ppt/slides/slide18.xml><?xml version="1.0" encoding="utf-8"?>
+<p:sld xmlns:a="http://schemas.openxmlformats.org/drawingml/2006/main" xmlns:r="http://schemas.openxmlformats.org/officeDocument/2006/relationships" xmlns:p="http://schemas.openxmlformats.org/presentationml/2006/main">
+  <p:cSld name="Slide 18">
+    <p:bg>
+      <p:bgPr>
+        <a:blipFill dpi="0" rotWithShape="1">
+          <a:blip r:embed="rId1">
+            <a:lum/>
+          </a:blip>
+          <a:srcRect/>
+          <a:stretch>
+            <a:fillRect/>
+          </a:stretch>
+        </a:blipFill>
+        <a:effectLst/>
+      </p:bgPr>
+    </p:bg>
+    <p:spTree>
+      <p:nvGrpSpPr>
+        <p:cNvPr id="1" name=""/>
+        <p:cNvGrpSpPr/>
+        <p:nvPr/>
+      </p:nvGrpSpPr>
+      <p:grpSpPr>
+        <a:xfrm>
+          <a:off x="0" y="0"/>
+          <a:ext cx="0" cy="0"/>
+          <a:chOff x="0" y="0"/>
+          <a:chExt cx="0" cy="0"/>
+        </a:xfrm>
+      </p:grpSpPr>
+    </p:spTree>
+  </p:cSld>
+  <p:clrMapOvr>
+    <a:masterClrMapping/>
+  </p:clrMapOvr>
+</p:sld>
+</file>
+
+<file path=ppt/slides/slide19.xml><?xml version="1.0" encoding="utf-8"?>
+<p:sld xmlns:a="http://schemas.openxmlformats.org/drawingml/2006/main" xmlns:r="http://schemas.openxmlformats.org/officeDocument/2006/relationships" xmlns:p="http://schemas.openxmlformats.org/presentationml/2006/main">
+  <p:cSld name="Slide 19">
     <p:bg>
       <p:bgPr>
         <a:blipFill dpi="0" rotWithShape="1">
